--- a/DBTUNING/ch17_성능개선방법론과긴급대응/ch17_성능개선방법론과긴급대응.pptx
+++ b/DBTUNING/ch17_성능개선방법론과긴급대응/ch17_성능개선방법론과긴급대응.pptx
@@ -536,7 +536,7 @@
           <a:lstStyle/>
           <a:p>
             <a:r>
-              <a:t>이 슬라이드는 방법론의 성격을 규정한다. 강조할 점은 방법론이 확정적 규칙이 아니라 사고의 절차라는 것이다. 시스템이 복잡하고 저마다 달라 딱 맞는 규칙이 없으므로, 결국 데이터와 통계를 근거로 판단하는 사람의 사고가 결정적이다. 경험 많은 엔지니어일수록 데이터를 건너뛰고 직관에 기대는 유혹에 빠지는데, 이것이 신화와 민담에 의한 튜닝이며 위험하고 비싸다는 점을 반드시 짚는다. ADDM이 방법론의 일부를 자동화하지만 권고는 결론이 아니라 가설이라는 1장의 태도를 다시 연결한다.</a:t>
+              <a:t>이 슬라이드는 방법론의 성격을 규정한다. 강조할 점은 방법론이 확정적 규칙이 아니라 사고의 절차라는 것이다. 시스템이 복잡하고 저마다 달라 딱 맞는 규칙이 없으므로, 결국 데이터와 통계를 근거로 판단하는 사람의 사고가 결정적이다. 경험 많은 엔지니어일수록 데이터를 건너뛰고 직관에 기대는 유혹에 빠지는데, 이것이 신화와 민담에 의한 튜닝이며 위험하고 비싸다는 점을 반드시 짚는다. ADDM이 방법론의 일부를 자동화하지만 권고는 결론이 아니라 가설이라는 ch15의 태도를 다시 연결한다.</a:t>
             </a:r>
           </a:p>
         </p:txBody>
@@ -676,7 +676,7 @@
           <a:lstStyle/>
           <a:p>
             <a:r>
-              <a:t>이 슬라이드가 3장의 핵심 DBA Point를 담는다. 응급 조치와 근본 원인 분석은 서로 다른 활동이므로 반드시 분리해야 한다. 응급 조치의 목표는 오직 서비스 회복이고, 세션 종료나 재시작은 증상을 멈추는 조치일 뿐 원인을 제거하는 조치가 아니다. 원인 분석은 서비스가 회복된 뒤 캡처해 둔 근거로 수행한다. 두 가지를 섞으면 원인을 따지느라 조치가 늦어 중단이 길어지거나, 조치만 하고 근거를 안 남겨 재발 시 원점에서 헤매게 된다. 그래서 순서가 근거 캡처, 응급 조치, 회복 검증, 원인 분석, 재발 방지가 되며, 캡처가 조치보다 앞선다. 조치를 하는 순간 증거가 사라지기 때문이다.</a:t>
+              <a:t>이 슬라이드가 ch17의 핵심 DBA Point를 담는다. 응급 조치와 근본 원인 분석은 서로 다른 활동이므로 반드시 분리해야 한다. 응급 조치의 목표는 오직 서비스 회복이고, 세션 종료나 재시작은 증상을 멈추는 조치일 뿐 원인을 제거하는 조치가 아니다. 원인 분석은 서비스가 회복된 뒤 캡처해 둔 근거로 수행한다. 두 가지를 섞으면 원인을 따지느라 조치가 늦어 중단이 길어지거나, 조치만 하고 근거를 안 남겨 재발 시 원점에서 헤매게 된다. 그래서 순서가 근거 캡처, 응급 조치, 회복 검증, 원인 분석, 재발 방지가 되며, 캡처가 조치보다 앞선다. 조치를 하는 순간 증거가 사라지기 때문이다.</a:t>
             </a:r>
           </a:p>
         </p:txBody>
@@ -1516,7 +1516,7 @@
           <a:lstStyle/>
           <a:p>
             <a:r>
-              <a:t>이 장을 관통하는 원칙을 최종 정리한다. 조치 전 상태를 캡처하지 않은 튜닝은 도박이다. 이 원칙은 만성적 저하를 다루는 방법론과 긴급 상황을 다루는 긴급 대응 모두에 똑같이 적용된다. 방법론에서는 한 번에 하나만 바꾸고 차이를 측정한다는 황금률의 전제로, 긴급 대응에서는 세션을 죽이기 전에 근거를 남긴다는 규율로 나타난다. 뿌리는 하나로, 조치 전 상태가 없으면 성공과 실패를 증명할 수 없고 원인을 사후에 규명할 수도 없다. 이것은 1장의 세 가지 경계 중 근거 없는 조치와 정확히 같은 뿌리를 가진다. 히트율 신앙, 권고 맹신, 근거 없는 조치는 모두 내가 직접 측정하고 판정하지 않았다는 하나의 잘못이다.</a:t>
+              <a:t>이 장을 관통하는 원칙을 최종 정리한다. 조치 전 상태를 캡처하지 않은 튜닝은 도박이다. 이 원칙은 만성적 저하를 다루는 방법론과 긴급 상황을 다루는 긴급 대응 모두에 똑같이 적용된다. 방법론에서는 한 번에 하나만 바꾸고 차이를 측정한다는 황금률의 전제로, 긴급 대응에서는 세션을 죽이기 전에 근거를 남긴다는 규율로 나타난다. 뿌리는 하나로, 조치 전 상태가 없으면 성공과 실패를 증명할 수 없고 원인을 사후에 규명할 수도 없다. 이것은 ch15의 세 가지 경계 중 근거 없는 조치와 정확히 같은 뿌리를 가진다. 히트율 신앙, 권고 맹신, 근거 없는 조치는 모두 내가 직접 측정하고 판정하지 않았다는 하나의 잘못이다.</a:t>
             </a:r>
           </a:p>
         </p:txBody>
@@ -1866,7 +1866,7 @@
           <a:lstStyle/>
           <a:p>
             <a:r>
-              <a:t>열 가지 실수의 앞 다섯 개를 설명한다. 1번 잘못된 커넥션 관리는 무상태 미들웨어에서 흔하며 성능에 두 자릿수 배 영향을 주고 전혀 확장되지 않는다. 2번 커서·공유 풀 오용은 바인드 변수를 쓰지 않아 전면 하드 파싱이 일어나는 경우로 2장·18장의 주제다. 3번 나쁜 SQL은 고부하 SQL을 ADDM이 식별하고 SQL Tuning Advisor가 권고한다. 4번 비표준 파라미터는 근거 없는 설정이 검증된 실행계획을 덮을 수 있어, 스키마·통계·옵티마이저 설정을 한 묶음으로 관리해야 한다. 5번 I/O 구성은 20장에서 깊이 다룬다. 이 목록이 가설의 출발점이라는 점을 강조한다.</a:t>
+              <a:t>열 가지 실수의 앞 다섯 개를 설명한다. 1번 잘못된 커넥션 관리는 무상태 미들웨어에서 흔하며 성능에 두 자릿수 배 영향을 주고 전혀 확장되지 않는다. 2번 커서·공유 풀 오용은 바인드 변수를 쓰지 않아 전면 하드 파싱이 일어나는 경우로 ch16·ch32의 주제다. 3번 나쁜 SQL은 고부하 SQL을 ADDM이 식별하고 SQL Tuning Advisor가 권고한다. 4번 비표준 파라미터는 근거 없는 설정이 검증된 실행계획을 덮을 수 있어, 스키마·통계·옵티마이저 설정을 한 묶음으로 관리해야 한다. 5번 I/O 구성은 ch34에서 깊이 다룬다. 이 목록이 가설의 출발점이라는 점을 강조한다.</a:t>
             </a:r>
           </a:p>
         </p:txBody>
@@ -5366,7 +5366,7 @@
                 <a:latin typeface="맑은 고딕"/>
                 <a:ea typeface="맑은 고딕"/>
               </a:rPr>
-              <a:t>제3장</a:t>
+              <a:t>제ch17</a:t>
             </a:r>
           </a:p>
         </p:txBody>
@@ -8989,7 +8989,7 @@
                 <a:latin typeface="맑은 고딕"/>
                 <a:ea typeface="맑은 고딕"/>
               </a:rPr>
-              <a:t>•  근본 예방은 짧은 트랜잭션·사용자 대기 중 잠금 미보유(2장)</a:t>
+              <a:t>•  근본 예방은 짧은 트랜잭션·사용자 대기 중 잠금 미보유(ch16)</a:t>
             </a:r>
           </a:p>
         </p:txBody>
@@ -11262,7 +11262,7 @@
                 <a:latin typeface="맑은 고딕"/>
                 <a:ea typeface="맑은 고딕"/>
               </a:rPr>
-              <a:t>•  1장 세 경계 중 '근거 없는 조치'와 같은 뿌리</a:t>
+              <a:t>•  ch15 세 경계 중 '근거 없는 조치'와 같은 뿌리</a:t>
             </a:r>
           </a:p>
           <a:p>
@@ -12081,7 +12081,7 @@
                 <a:latin typeface="맑은 고딕"/>
                 <a:ea typeface="맑은 고딕"/>
               </a:rPr>
-              <a:t>•  실습 04 — 블로킹 세션 추적과 해소(실측 SID 596/597) — 3장 핵심</a:t>
+              <a:t>•  실습 04 — 블로킹 세션 추적과 해소(실측 SID 596/597) — ch17 핵심</a:t>
             </a:r>
           </a:p>
           <a:p>
@@ -12778,7 +12778,7 @@
                 <a:latin typeface="맑은 고딕"/>
                 <a:ea typeface="맑은 고딕"/>
               </a:rPr>
-              <a:t>•  확인 없는 변경은 방법론이 아니라 도박(1장 '근거 없는 조치')</a:t>
+              <a:t>•  확인 없는 변경은 방법론이 아니라 도박(ch15 '근거 없는 조치')</a:t>
             </a:r>
           </a:p>
           <a:p>

--- a/DBTUNING/ch17_성능개선방법론과긴급대응/ch17_성능개선방법론과긴급대응.pptx
+++ b/DBTUNING/ch17_성능개선방법론과긴급대응/ch17_성능개선방법론과긴급대응.pptx
@@ -5366,7 +5366,7 @@
                 <a:latin typeface="맑은 고딕"/>
                 <a:ea typeface="맑은 고딕"/>
               </a:rPr>
-              <a:t>제ch17</a:t>
+              <a:t>ch17</a:t>
             </a:r>
           </a:p>
         </p:txBody>

--- a/DBTUNING/ch17_성능개선방법론과긴급대응/ch17_성능개선방법론과긴급대응.pptx
+++ b/DBTUNING/ch17_성능개선방법론과긴급대응/ch17_성능개선방법론과긴급대응.pptx
@@ -5464,7 +5464,7 @@
                 <a:latin typeface="맑은 고딕"/>
                 <a:ea typeface="맑은 고딕"/>
               </a:rPr>
-              <a:t>3.3</a:t>
+              <a:t>17.3</a:t>
             </a:r>
           </a:p>
         </p:txBody>
@@ -6383,7 +6383,7 @@
                 <a:latin typeface="맑은 고딕"/>
                 <a:ea typeface="맑은 고딕"/>
               </a:rPr>
-              <a:t>3.4</a:t>
+              <a:t>17.4</a:t>
             </a:r>
           </a:p>
         </p:txBody>
@@ -7302,7 +7302,7 @@
                 <a:latin typeface="맑은 고딕"/>
                 <a:ea typeface="맑은 고딕"/>
               </a:rPr>
-              <a:t>3.5</a:t>
+              <a:t>17.5</a:t>
             </a:r>
           </a:p>
         </p:txBody>
@@ -7666,7 +7666,7 @@
                 <a:latin typeface="맑은 고딕"/>
                 <a:ea typeface="맑은 고딕"/>
               </a:rPr>
-              <a:t>•  Application 클래스 → 잠금 경합(3.6절), Concurrency → 라이브러리 캐시</a:t>
+              <a:t>•  Application 클래스 → 잠금 경합(17.6절), Concurrency → 라이브러리 캐시</a:t>
             </a:r>
           </a:p>
           <a:p>
@@ -8612,7 +8612,7 @@
                 <a:latin typeface="맑은 고딕"/>
                 <a:ea typeface="맑은 고딕"/>
               </a:rPr>
-              <a:t>3.6</a:t>
+              <a:t>17.6</a:t>
             </a:r>
           </a:p>
         </p:txBody>
@@ -10722,7 +10722,7 @@
                 <a:latin typeface="맑은 고딕"/>
                 <a:ea typeface="맑은 고딕"/>
               </a:rPr>
-              <a:t>•  3.2  오라클 성능 개선 방법론 — 일하는 방식과 여섯 단계</a:t>
+              <a:t>•  17.2  오라클 성능 개선 방법론 — 일하는 방식과 여섯 단계</a:t>
             </a:r>
           </a:p>
           <a:p>
@@ -10735,7 +10735,7 @@
                 <a:latin typeface="맑은 고딕"/>
                 <a:ea typeface="맑은 고딕"/>
               </a:rPr>
-              <a:t>•  3.3  증상에서 원인으로 — 자주 나오는 열 가지 실수</a:t>
+              <a:t>•  17.3  증상에서 원인으로 — 자주 나오는 열 가지 실수</a:t>
             </a:r>
           </a:p>
           <a:p>
@@ -10748,7 +10748,7 @@
                 <a:latin typeface="맑은 고딕"/>
                 <a:ea typeface="맑은 고딕"/>
               </a:rPr>
-              <a:t>•  3.4  긴급 대응 — 다섯 단계와 '조치·원인 분석 분리'</a:t>
+              <a:t>•  17.4  긴급 대응 — 다섯 단계와 '조치·원인 분석 분리'</a:t>
             </a:r>
           </a:p>
           <a:p>
@@ -10761,7 +10761,7 @@
                 <a:latin typeface="맑은 고딕"/>
                 <a:ea typeface="맑은 고딕"/>
               </a:rPr>
-              <a:t>•  3.5  응급 진단 체크리스트 — CPU 병목인가 대기 병목인가</a:t>
+              <a:t>•  17.5  응급 진단 체크리스트 — CPU 병목인가 대기 병목인가</a:t>
             </a:r>
           </a:p>
           <a:p>
@@ -10774,7 +10774,7 @@
                 <a:latin typeface="맑은 고딕"/>
                 <a:ea typeface="맑은 고딕"/>
               </a:rPr>
-              <a:t>•  3.6  블로킹 세션 추적과 해소 (실측 SID 596/597)</a:t>
+              <a:t>•  17.6  블로킹 세션 추적과 해소 (실측 SID 596/597)</a:t>
             </a:r>
           </a:p>
           <a:p>
@@ -10787,7 +10787,7 @@
                 <a:latin typeface="맑은 고딕"/>
                 <a:ea typeface="맑은 고딕"/>
               </a:rPr>
-              <a:t>•  3.7  조치 전 근거 캡처 — 도박이 아니라 튜닝</a:t>
+              <a:t>•  17.7  조치 전 근거 캡처 — 도박이 아니라 튜닝</a:t>
             </a:r>
           </a:p>
           <a:p>
@@ -10800,7 +10800,7 @@
                 <a:latin typeface="맑은 고딕"/>
                 <a:ea typeface="맑은 고딕"/>
               </a:rPr>
-              <a:t>•  3.8~3.10  요약 · 퀴즈 · 실습 개요</a:t>
+              <a:t>•  17.8~17.10  요약 · 퀴즈 · 실습 개요</a:t>
             </a:r>
           </a:p>
         </p:txBody>
@@ -10898,7 +10898,7 @@
                 <a:latin typeface="맑은 고딕"/>
                 <a:ea typeface="맑은 고딕"/>
               </a:rPr>
-              <a:t>3.7</a:t>
+              <a:t>17.7</a:t>
             </a:r>
           </a:p>
         </p:txBody>
@@ -12218,7 +12218,7 @@
                 <a:latin typeface="맑은 고딕"/>
                 <a:ea typeface="맑은 고딕"/>
               </a:rPr>
-              <a:t>3.2</a:t>
+              <a:t>17.2</a:t>
             </a:r>
           </a:p>
         </p:txBody>
